--- a/Introduction to Fortran Slides.pptx
+++ b/Introduction to Fortran Slides.pptx
@@ -178,74 +178,61 @@
 </p:presentation>
 </file>
 
+<file path=ppt/revisionInfo.xml><?xml version="1.0" encoding="utf-8"?>
+<p1510:revInfo xmlns:a="http://schemas.openxmlformats.org/drawingml/2006/main" xmlns:r="http://schemas.openxmlformats.org/officeDocument/2006/relationships" xmlns:p1510="http://schemas.microsoft.com/office/powerpoint/2015/10/main">
+  <p1510:revLst>
+    <p1510:client id="{97AB08F3-3D16-47BC-AE64-DE1B4A779B76}" v="7" dt="2026-10-09T09:14:59.514"/>
+  </p1510:revLst>
+</p1510:revInfo>
+</file>
+
 <file path=ppt/changesInfos/changesInfo1.xml><?xml version="1.0" encoding="utf-8"?>
 <pc:chgInfo xmlns:a="http://schemas.openxmlformats.org/drawingml/2006/main" xmlns:r="http://schemas.openxmlformats.org/officeDocument/2006/relationships" xmlns:ac="http://schemas.microsoft.com/office/drawing/2013/main/command" xmlns:pc="http://schemas.microsoft.com/office/powerpoint/2013/main/command">
   <pc:docChgLst>
     <pc:chgData name="Cooling, Chris" userId="6dcf99c9-2ba5-410a-8445-0893a3d1421f" providerId="ADAL" clId="{0564427D-CD1D-4B33-9C97-2A8069F97102}"/>
-    <pc:docChg chg="modSld">
-      <pc:chgData name="Cooling, Chris" userId="6dcf99c9-2ba5-410a-8445-0893a3d1421f" providerId="ADAL" clId="{0564427D-CD1D-4B33-9C97-2A8069F97102}" dt="2026-05-29T10:54:56.157" v="16" actId="20577"/>
+    <pc:docChg chg="custSel modSld">
+      <pc:chgData name="Cooling, Chris" userId="6dcf99c9-2ba5-410a-8445-0893a3d1421f" providerId="ADAL" clId="{0564427D-CD1D-4B33-9C97-2A8069F97102}" dt="2026-10-09T09:19:03.065" v="31" actId="20577"/>
       <pc:docMkLst>
         <pc:docMk/>
       </pc:docMkLst>
-      <pc:sldChg chg="modSp mod">
-        <pc:chgData name="Cooling, Chris" userId="6dcf99c9-2ba5-410a-8445-0893a3d1421f" providerId="ADAL" clId="{0564427D-CD1D-4B33-9C97-2A8069F97102}" dt="2026-05-29T10:54:56.157" v="16" actId="20577"/>
+      <pc:sldChg chg="addSp delSp modSp mod">
+        <pc:chgData name="Cooling, Chris" userId="6dcf99c9-2ba5-410a-8445-0893a3d1421f" providerId="ADAL" clId="{0564427D-CD1D-4B33-9C97-2A8069F97102}" dt="2026-10-09T09:19:03.065" v="31" actId="20577"/>
         <pc:sldMkLst>
           <pc:docMk/>
-          <pc:sldMk cId="620213683" sldId="393"/>
+          <pc:sldMk cId="1507190070" sldId="359"/>
         </pc:sldMkLst>
         <pc:spChg chg="mod">
-          <ac:chgData name="Cooling, Chris" userId="6dcf99c9-2ba5-410a-8445-0893a3d1421f" providerId="ADAL" clId="{0564427D-CD1D-4B33-9C97-2A8069F97102}" dt="2026-05-29T10:54:56.157" v="16" actId="20577"/>
+          <ac:chgData name="Cooling, Chris" userId="6dcf99c9-2ba5-410a-8445-0893a3d1421f" providerId="ADAL" clId="{0564427D-CD1D-4B33-9C97-2A8069F97102}" dt="2026-10-09T09:19:03.065" v="31" actId="20577"/>
           <ac:spMkLst>
             <pc:docMk/>
-            <pc:sldMk cId="620213683" sldId="393"/>
-            <ac:spMk id="3" creationId="{2C7A6954-5AE7-6E35-86E6-C550777AAF6E}"/>
+            <pc:sldMk cId="1507190070" sldId="359"/>
+            <ac:spMk id="6" creationId="{F67B57BE-29B8-B7BA-15CB-930F83F6EB26}"/>
           </ac:spMkLst>
         </pc:spChg>
-      </pc:sldChg>
-      <pc:sldChg chg="modSp mod">
-        <pc:chgData name="Cooling, Chris" userId="6dcf99c9-2ba5-410a-8445-0893a3d1421f" providerId="ADAL" clId="{0564427D-CD1D-4B33-9C97-2A8069F97102}" dt="2026-05-29T10:54:48.771" v="15" actId="20577"/>
-        <pc:sldMkLst>
-          <pc:docMk/>
-          <pc:sldMk cId="4103524331" sldId="396"/>
-        </pc:sldMkLst>
-        <pc:spChg chg="mod">
-          <ac:chgData name="Cooling, Chris" userId="6dcf99c9-2ba5-410a-8445-0893a3d1421f" providerId="ADAL" clId="{0564427D-CD1D-4B33-9C97-2A8069F97102}" dt="2026-05-29T10:54:48.771" v="15" actId="20577"/>
-          <ac:spMkLst>
+        <pc:picChg chg="add mod">
+          <ac:chgData name="Cooling, Chris" userId="6dcf99c9-2ba5-410a-8445-0893a3d1421f" providerId="ADAL" clId="{0564427D-CD1D-4B33-9C97-2A8069F97102}" dt="2026-10-09T09:13:54.090" v="22" actId="1076"/>
+          <ac:picMkLst>
             <pc:docMk/>
-            <pc:sldMk cId="4103524331" sldId="396"/>
-            <ac:spMk id="9" creationId="{74665D48-6B86-2775-C338-4B0E135D3E0F}"/>
-          </ac:spMkLst>
-        </pc:spChg>
-      </pc:sldChg>
-      <pc:sldChg chg="modSp mod">
-        <pc:chgData name="Cooling, Chris" userId="6dcf99c9-2ba5-410a-8445-0893a3d1421f" providerId="ADAL" clId="{0564427D-CD1D-4B33-9C97-2A8069F97102}" dt="2026-05-29T10:54:37.211" v="13" actId="20577"/>
-        <pc:sldMkLst>
-          <pc:docMk/>
-          <pc:sldMk cId="3921319063" sldId="398"/>
-        </pc:sldMkLst>
-        <pc:spChg chg="mod">
-          <ac:chgData name="Cooling, Chris" userId="6dcf99c9-2ba5-410a-8445-0893a3d1421f" providerId="ADAL" clId="{0564427D-CD1D-4B33-9C97-2A8069F97102}" dt="2026-05-29T10:54:37.211" v="13" actId="20577"/>
-          <ac:spMkLst>
+            <pc:sldMk cId="1507190070" sldId="359"/>
+            <ac:picMk id="5" creationId="{2C2BBD9F-54B5-D899-83F0-132D22E62BED}"/>
+          </ac:picMkLst>
+        </pc:picChg>
+        <pc:picChg chg="del">
+          <ac:chgData name="Cooling, Chris" userId="6dcf99c9-2ba5-410a-8445-0893a3d1421f" providerId="ADAL" clId="{0564427D-CD1D-4B33-9C97-2A8069F97102}" dt="2026-10-09T09:13:45.006" v="17" actId="478"/>
+          <ac:picMkLst>
             <pc:docMk/>
-            <pc:sldMk cId="3921319063" sldId="398"/>
-            <ac:spMk id="8" creationId="{5EFFB270-A444-4DE2-0DE3-DF516468DA9F}"/>
-          </ac:spMkLst>
-        </pc:spChg>
-      </pc:sldChg>
-      <pc:sldChg chg="modSp mod">
-        <pc:chgData name="Cooling, Chris" userId="6dcf99c9-2ba5-410a-8445-0893a3d1421f" providerId="ADAL" clId="{0564427D-CD1D-4B33-9C97-2A8069F97102}" dt="2026-05-29T10:54:20.902" v="5" actId="20577"/>
-        <pc:sldMkLst>
-          <pc:docMk/>
-          <pc:sldMk cId="3172791869" sldId="399"/>
-        </pc:sldMkLst>
-        <pc:spChg chg="mod">
-          <ac:chgData name="Cooling, Chris" userId="6dcf99c9-2ba5-410a-8445-0893a3d1421f" providerId="ADAL" clId="{0564427D-CD1D-4B33-9C97-2A8069F97102}" dt="2026-05-29T10:54:20.902" v="5" actId="20577"/>
-          <ac:spMkLst>
+            <pc:sldMk cId="1507190070" sldId="359"/>
+            <ac:picMk id="10" creationId="{AEABC408-700F-4CEB-9570-F86C4BB6F36F}"/>
+          </ac:picMkLst>
+        </pc:picChg>
+        <pc:picChg chg="add del">
+          <ac:chgData name="Cooling, Chris" userId="6dcf99c9-2ba5-410a-8445-0893a3d1421f" providerId="ADAL" clId="{0564427D-CD1D-4B33-9C97-2A8069F97102}" dt="2026-10-09T09:14:17.150" v="24" actId="478"/>
+          <ac:picMkLst>
             <pc:docMk/>
-            <pc:sldMk cId="3172791869" sldId="399"/>
-            <ac:spMk id="8" creationId="{5EFFB270-A444-4DE2-0DE3-DF516468DA9F}"/>
-          </ac:spMkLst>
-        </pc:spChg>
+            <pc:sldMk cId="1507190070" sldId="359"/>
+            <ac:picMk id="11" creationId="{C6D08196-A89D-C773-7E8A-C884DA7FD353}"/>
+          </ac:picMkLst>
+        </pc:picChg>
       </pc:sldChg>
     </pc:docChg>
   </pc:docChgLst>
@@ -334,7 +321,7 @@
           <a:p>
             <a:fld id="{D2E0D2A8-8F95-47C2-ABE1-A779F5A43C98}" type="datetimeFigureOut">
               <a:rPr lang="en-US" smtClean="0"/>
-              <a:t>5/29/2026</a:t>
+              <a:t>10/9/2026</a:t>
             </a:fld>
             <a:endParaRPr lang="en-US"/>
           </a:p>
@@ -8953,7 +8940,7 @@
           <a:p>
             <a:fld id="{32DA68FE-35E0-4C63-B55D-7E4144F39E69}" type="datetime1">
               <a:rPr lang="en-GB" smtClean="0"/>
-              <a:t>29/05/2026</a:t>
+              <a:t>09/10/2026</a:t>
             </a:fld>
             <a:endParaRPr lang="en-GB"/>
           </a:p>
@@ -9279,7 +9266,7 @@
           <a:p>
             <a:fld id="{ACAE6301-47B1-4E38-A42E-FF88C8E2547E}" type="datetime1">
               <a:rPr lang="en-GB" smtClean="0"/>
-              <a:t>29/05/2026</a:t>
+              <a:t>09/10/2026</a:t>
             </a:fld>
             <a:endParaRPr lang="en-GB"/>
           </a:p>
@@ -9607,7 +9594,7 @@
           <a:p>
             <a:fld id="{60CE9BE8-7102-4F25-9608-875CE36DCE2C}" type="datetime1">
               <a:rPr lang="en-GB" smtClean="0"/>
-              <a:t>29/05/2026</a:t>
+              <a:t>09/10/2026</a:t>
             </a:fld>
             <a:endParaRPr lang="en-GB"/>
           </a:p>
@@ -9983,7 +9970,7 @@
           <a:p>
             <a:fld id="{7FFE0D53-2649-4A6A-B728-0624D2A8C82F}" type="datetime1">
               <a:rPr lang="en-GB" smtClean="0"/>
-              <a:t>29/05/2026</a:t>
+              <a:t>09/10/2026</a:t>
             </a:fld>
             <a:endParaRPr lang="en-GB"/>
           </a:p>
@@ -10366,7 +10353,7 @@
           <a:p>
             <a:fld id="{1E0F9E6D-467C-4E97-B6D3-4AEC11D733E3}" type="datetime1">
               <a:rPr lang="en-GB" smtClean="0"/>
-              <a:t>29/05/2026</a:t>
+              <a:t>09/10/2026</a:t>
             </a:fld>
             <a:endParaRPr lang="en-GB"/>
           </a:p>
@@ -10751,7 +10738,7 @@
           <a:p>
             <a:fld id="{6B814A64-A4A4-4D05-8C32-14D248CB5579}" type="datetime1">
               <a:rPr lang="en-GB" smtClean="0"/>
-              <a:t>29/05/2026</a:t>
+              <a:t>09/10/2026</a:t>
             </a:fld>
             <a:endParaRPr lang="en-GB"/>
           </a:p>
@@ -10978,7 +10965,7 @@
           <a:p>
             <a:fld id="{EF7AD603-E356-462E-8CD3-ACD880ADAC9C}" type="datetime1">
               <a:rPr lang="en-GB" smtClean="0"/>
-              <a:t>29/05/2026</a:t>
+              <a:t>09/10/2026</a:t>
             </a:fld>
             <a:endParaRPr lang="en-GB"/>
           </a:p>
@@ -11476,7 +11463,7 @@
           <a:p>
             <a:fld id="{F2FA34D9-5BC3-49E0-8995-8830C5E40F86}" type="datetime1">
               <a:rPr lang="en-GB" smtClean="0"/>
-              <a:t>29/05/2026</a:t>
+              <a:t>09/10/2026</a:t>
             </a:fld>
             <a:endParaRPr lang="en-GB"/>
           </a:p>
@@ -11976,7 +11963,7 @@
           <a:p>
             <a:fld id="{EA8A7FF5-6086-41FA-A1AC-70237306CE6F}" type="datetime1">
               <a:rPr lang="en-GB" smtClean="0"/>
-              <a:t>29/05/2026</a:t>
+              <a:t>09/10/2026</a:t>
             </a:fld>
             <a:endParaRPr lang="en-GB"/>
           </a:p>
@@ -12466,7 +12453,7 @@
           <a:p>
             <a:fld id="{B357A878-FC9F-4066-9AC7-68B8CF7A61B8}" type="datetime1">
               <a:rPr lang="en-GB" smtClean="0"/>
-              <a:t>29/05/2026</a:t>
+              <a:t>09/10/2026</a:t>
             </a:fld>
             <a:endParaRPr lang="en-GB"/>
           </a:p>
@@ -13277,7 +13264,7 @@
           <a:p>
             <a:fld id="{4723A53D-0705-4632-B587-1143AC72FBD3}" type="datetime1">
               <a:rPr lang="en-GB" smtClean="0"/>
-              <a:t>29/05/2026</a:t>
+              <a:t>09/10/2026</a:t>
             </a:fld>
             <a:endParaRPr lang="en-GB"/>
           </a:p>
@@ -13894,7 +13881,7 @@
           <a:p>
             <a:fld id="{6816C2BA-1BDF-4758-AF67-EF9ECF794495}" type="datetime1">
               <a:rPr lang="en-GB" smtClean="0"/>
-              <a:t>29/05/2026</a:t>
+              <a:t>09/10/2026</a:t>
             </a:fld>
             <a:endParaRPr lang="en-GB"/>
           </a:p>
@@ -14514,7 +14501,7 @@
           <a:p>
             <a:fld id="{5D5850D4-55A6-48B3-8EBA-06F44CE8ACE0}" type="datetime1">
               <a:rPr lang="en-GB" smtClean="0"/>
-              <a:t>29/05/2026</a:t>
+              <a:t>09/10/2026</a:t>
             </a:fld>
             <a:endParaRPr lang="en-GB"/>
           </a:p>
@@ -14685,7 +14672,7 @@
           <a:p>
             <a:fld id="{8BAE2621-AABD-4469-B26D-59098756F71C}" type="datetime1">
               <a:rPr lang="en-GB" smtClean="0"/>
-              <a:t>29/05/2026</a:t>
+              <a:t>09/10/2026</a:t>
             </a:fld>
             <a:endParaRPr lang="en-GB"/>
           </a:p>
@@ -14858,7 +14845,7 @@
           <a:p>
             <a:fld id="{0877AD66-B699-406C-98B6-C6D40B69B665}" type="datetime1">
               <a:rPr lang="en-GB" smtClean="0"/>
-              <a:t>29/05/2026</a:t>
+              <a:t>09/10/2026</a:t>
             </a:fld>
             <a:endParaRPr lang="en-GB"/>
           </a:p>
@@ -15037,7 +15024,7 @@
           <a:p>
             <a:fld id="{1CBCC50E-5DC9-48F1-BD30-63FFB77F2CB5}" type="datetime1">
               <a:rPr lang="en-GB" smtClean="0"/>
-              <a:t>29/05/2026</a:t>
+              <a:t>09/10/2026</a:t>
             </a:fld>
             <a:endParaRPr lang="en-GB" dirty="0"/>
           </a:p>
@@ -15231,7 +15218,7 @@
           <a:p>
             <a:fld id="{C0140273-5355-4941-A561-FEB1BF7807AA}" type="datetime1">
               <a:rPr lang="en-GB" smtClean="0"/>
-              <a:t>29/05/2026</a:t>
+              <a:t>09/10/2026</a:t>
             </a:fld>
             <a:endParaRPr lang="en-GB" dirty="0"/>
           </a:p>
@@ -15511,7 +15498,7 @@
           <a:p>
             <a:fld id="{FC4D92B1-2CEF-4B06-9391-EDDEEBE2192F}" type="datetime1">
               <a:rPr lang="en-GB" smtClean="0"/>
-              <a:t>29/05/2026</a:t>
+              <a:t>09/10/2026</a:t>
             </a:fld>
             <a:endParaRPr lang="en-GB" dirty="0"/>
           </a:p>
@@ -15792,7 +15779,7 @@
           <a:p>
             <a:fld id="{4A451508-E484-4BE6-BA12-C15123FC5E22}" type="datetime1">
               <a:rPr lang="en-GB" smtClean="0"/>
-              <a:t>29/05/2026</a:t>
+              <a:t>09/10/2026</a:t>
             </a:fld>
             <a:endParaRPr lang="en-GB" dirty="0"/>
           </a:p>
@@ -16072,7 +16059,7 @@
           <a:p>
             <a:fld id="{A68544DF-6A57-4FD8-AE5D-8F7A6A16674B}" type="datetime1">
               <a:rPr lang="en-GB" smtClean="0"/>
-              <a:t>29/05/2026</a:t>
+              <a:t>09/10/2026</a:t>
             </a:fld>
             <a:endParaRPr lang="en-GB" dirty="0"/>
           </a:p>
@@ -16548,7 +16535,7 @@
           <a:p>
             <a:fld id="{0163C9A6-2A3C-4EFB-AB7A-782D179938E9}" type="datetime1">
               <a:rPr lang="en-GB" smtClean="0"/>
-              <a:t>29/05/2026</a:t>
+              <a:t>09/10/2026</a:t>
             </a:fld>
             <a:endParaRPr lang="en-GB" dirty="0"/>
           </a:p>
@@ -16828,7 +16815,7 @@
           <a:p>
             <a:fld id="{51BD37BB-1143-4AD6-A6DE-870C5009A408}" type="datetime1">
               <a:rPr lang="en-GB" smtClean="0"/>
-              <a:t>29/05/2026</a:t>
+              <a:t>09/10/2026</a:t>
             </a:fld>
             <a:endParaRPr lang="en-GB" dirty="0"/>
           </a:p>
@@ -17108,7 +17095,7 @@
           <a:p>
             <a:fld id="{4E3F2BB6-F59A-4765-9282-DEDF930A58E5}" type="datetime1">
               <a:rPr lang="en-GB" smtClean="0"/>
-              <a:t>29/05/2026</a:t>
+              <a:t>09/10/2026</a:t>
             </a:fld>
             <a:endParaRPr lang="en-GB" dirty="0"/>
           </a:p>
@@ -17372,7 +17359,7 @@
           <a:p>
             <a:fld id="{9267B220-D710-480A-9F0E-1B99697D4B76}" type="datetime1">
               <a:rPr lang="en-GB" smtClean="0"/>
-              <a:t>29/05/2026</a:t>
+              <a:t>09/10/2026</a:t>
             </a:fld>
             <a:endParaRPr lang="en-GB"/>
           </a:p>
@@ -17760,7 +17747,7 @@
           <a:p>
             <a:fld id="{463F635F-85CE-48F5-B29E-A69BA01F5913}" type="datetime1">
               <a:rPr lang="en-GB" smtClean="0"/>
-              <a:t>29/05/2026</a:t>
+              <a:t>09/10/2026</a:t>
             </a:fld>
             <a:endParaRPr lang="en-GB"/>
           </a:p>
@@ -18142,7 +18129,7 @@
           <a:p>
             <a:fld id="{3C09A8BF-1C0C-47E0-81BF-29E8EC8A04C0}" type="datetime1">
               <a:rPr lang="en-GB" smtClean="0"/>
-              <a:t>29/05/2026</a:t>
+              <a:t>09/10/2026</a:t>
             </a:fld>
             <a:endParaRPr lang="en-GB"/>
           </a:p>
@@ -18514,7 +18501,7 @@
           <a:p>
             <a:fld id="{75705C4E-C301-49FE-817A-C72B8467D22C}" type="datetime1">
               <a:rPr lang="en-GB" smtClean="0"/>
-              <a:t>29/05/2026</a:t>
+              <a:t>09/10/2026</a:t>
             </a:fld>
             <a:endParaRPr lang="en-GB"/>
           </a:p>
@@ -18921,7 +18908,7 @@
           <a:p>
             <a:fld id="{9D7F5417-1340-4936-893F-33FDA83AB755}" type="datetime1">
               <a:rPr lang="en-GB" smtClean="0"/>
-              <a:t>29/05/2026</a:t>
+              <a:t>09/10/2026</a:t>
             </a:fld>
             <a:endParaRPr lang="en-GB"/>
           </a:p>
@@ -19330,7 +19317,7 @@
           <a:p>
             <a:fld id="{8C2EAA56-45D2-4B0C-BE18-733F5D3F41E1}" type="datetime1">
               <a:rPr lang="en-GB" smtClean="0"/>
-              <a:t>29/05/2026</a:t>
+              <a:t>09/10/2026</a:t>
             </a:fld>
             <a:endParaRPr lang="en-GB"/>
           </a:p>
@@ -19729,7 +19716,7 @@
           <a:p>
             <a:fld id="{F8627E84-3412-4D77-8163-04EB81761086}" type="datetime1">
               <a:rPr lang="en-GB" smtClean="0"/>
-              <a:t>29/05/2026</a:t>
+              <a:t>09/10/2026</a:t>
             </a:fld>
             <a:endParaRPr lang="en-GB"/>
           </a:p>
@@ -20527,7 +20514,7 @@
           <a:p>
             <a:fld id="{E07C0731-B05A-4708-851B-89F1301C65B4}" type="datetime1">
               <a:rPr lang="en-GB" smtClean="0"/>
-              <a:t>29/05/2026</a:t>
+              <a:t>09/10/2026</a:t>
             </a:fld>
             <a:endParaRPr lang="en-GB"/>
           </a:p>
@@ -21131,7 +21118,7 @@
           <a:p>
             <a:fld id="{9C2109FA-7EAB-446C-9425-99916FBF51F8}" type="datetime1">
               <a:rPr lang="en-GB" smtClean="0"/>
-              <a:t>29/05/2026</a:t>
+              <a:t>09/10/2026</a:t>
             </a:fld>
             <a:endParaRPr lang="en-GB"/>
           </a:p>
@@ -21725,7 +21712,7 @@
           <a:p>
             <a:fld id="{404CCB9A-3E6F-4E9E-9D03-9DE0FE512382}" type="datetime1">
               <a:rPr lang="en-GB" smtClean="0"/>
-              <a:t>29/05/2026</a:t>
+              <a:t>09/10/2026</a:t>
             </a:fld>
             <a:endParaRPr lang="en-GB"/>
           </a:p>
@@ -22062,7 +22049,7 @@
           <a:p>
             <a:fld id="{FBF7CCFE-73F6-489F-BB2C-970D664306E2}" type="datetime1">
               <a:rPr lang="en-GB" smtClean="0"/>
-              <a:t>29/05/2026</a:t>
+              <a:t>09/10/2026</a:t>
             </a:fld>
             <a:endParaRPr lang="en-GB"/>
           </a:p>
@@ -22401,7 +22388,7 @@
           <a:p>
             <a:fld id="{0CEBB5BF-8840-4120-8906-E582A74DA247}" type="datetime1">
               <a:rPr lang="en-GB" smtClean="0"/>
-              <a:t>29/05/2026</a:t>
+              <a:t>09/10/2026</a:t>
             </a:fld>
             <a:endParaRPr lang="en-GB"/>
           </a:p>
@@ -22730,7 +22717,7 @@
           <a:p>
             <a:fld id="{5A543189-0BC2-4A91-8403-4CC6A26329C2}" type="datetime1">
               <a:rPr lang="en-GB" smtClean="0"/>
-              <a:t>29/05/2026</a:t>
+              <a:t>09/10/2026</a:t>
             </a:fld>
             <a:endParaRPr lang="en-GB"/>
           </a:p>
@@ -23067,7 +23054,7 @@
           <a:p>
             <a:fld id="{4AD4B7D3-E1EC-48CA-BB38-F3BB3372FA79}" type="datetime1">
               <a:rPr lang="en-GB" smtClean="0"/>
-              <a:t>29/05/2026</a:t>
+              <a:t>09/10/2026</a:t>
             </a:fld>
             <a:endParaRPr lang="en-GB"/>
           </a:p>
@@ -23406,7 +23393,7 @@
           <a:p>
             <a:fld id="{2DA41761-0263-40E9-8B43-FE05F2F266E9}" type="datetime1">
               <a:rPr lang="en-GB" smtClean="0"/>
-              <a:t>29/05/2026</a:t>
+              <a:t>09/10/2026</a:t>
             </a:fld>
             <a:endParaRPr lang="en-GB"/>
           </a:p>
@@ -23735,7 +23722,7 @@
           <a:p>
             <a:fld id="{3FABE1CC-504A-41EA-8A0D-C0C11C5DAE8D}" type="datetime1">
               <a:rPr lang="en-GB" smtClean="0"/>
-              <a:t>29/05/2026</a:t>
+              <a:t>09/10/2026</a:t>
             </a:fld>
             <a:endParaRPr lang="en-GB"/>
           </a:p>
@@ -23973,7 +23960,7 @@
           <a:p>
             <a:fld id="{0B7FF3BA-8A3A-4FF6-8E38-6F0EF3689765}" type="datetime1">
               <a:rPr lang="en-GB" smtClean="0"/>
-              <a:t>29/05/2026</a:t>
+              <a:t>09/10/2026</a:t>
             </a:fld>
             <a:endParaRPr lang="en-GB"/>
           </a:p>
@@ -24409,7 +24396,7 @@
           <a:p>
             <a:fld id="{1C4C0C84-A4AC-4F4E-85D7-49DC96D3608B}" type="datetime1">
               <a:rPr lang="en-GB" smtClean="0"/>
-              <a:t>29/05/2026</a:t>
+              <a:t>09/10/2026</a:t>
             </a:fld>
             <a:endParaRPr lang="en-GB"/>
           </a:p>
@@ -24947,7 +24934,7 @@
           <a:p>
             <a:fld id="{77A567A4-7E6C-4258-A739-CDFE096FE298}" type="datetime1">
               <a:rPr lang="en-GB" smtClean="0"/>
-              <a:t>29/05/2026</a:t>
+              <a:t>09/10/2026</a:t>
             </a:fld>
             <a:endParaRPr lang="en-GB"/>
           </a:p>
@@ -25226,7 +25213,7 @@
           <a:p>
             <a:fld id="{EF267122-F2A0-493F-9503-B91EAC92A4A8}" type="datetime1">
               <a:rPr lang="en-GB" smtClean="0"/>
-              <a:t>29/05/2026</a:t>
+              <a:t>09/10/2026</a:t>
             </a:fld>
             <a:endParaRPr lang="en-GB"/>
           </a:p>
@@ -25511,7 +25498,7 @@
           <a:p>
             <a:fld id="{54C04FEB-BD28-43EB-99B6-C402968411E5}" type="datetime1">
               <a:rPr lang="en-GB" smtClean="0"/>
-              <a:t>29/05/2026</a:t>
+              <a:t>09/10/2026</a:t>
             </a:fld>
             <a:endParaRPr lang="en-GB"/>
           </a:p>
@@ -25804,7 +25791,7 @@
           <a:p>
             <a:fld id="{3FCFA596-EF70-43F5-9709-8482BAFAA7E0}" type="datetime1">
               <a:rPr lang="en-GB" smtClean="0"/>
-              <a:t>29/05/2026</a:t>
+              <a:t>09/10/2026</a:t>
             </a:fld>
             <a:endParaRPr lang="en-GB"/>
           </a:p>
@@ -26221,7 +26208,7 @@
           <a:p>
             <a:fld id="{BCC715E1-D0BB-4D3D-91B7-4007BDA25E50}" type="datetime1">
               <a:rPr lang="en-GB" smtClean="0"/>
-              <a:t>29/05/2026</a:t>
+              <a:t>09/10/2026</a:t>
             </a:fld>
             <a:endParaRPr lang="en-GB" dirty="0"/>
           </a:p>
@@ -26958,7 +26945,7 @@
           <a:p>
             <a:fld id="{4B4BC937-2805-4BE1-9C10-C67D8B6C9243}" type="datetime1">
               <a:rPr lang="en-GB" smtClean="0"/>
-              <a:t>29/05/2026</a:t>
+              <a:t>09/10/2026</a:t>
             </a:fld>
             <a:endParaRPr lang="en-GB"/>
           </a:p>
@@ -27314,7 +27301,7 @@
           <a:p>
             <a:fld id="{4B4BC937-2805-4BE1-9C10-C67D8B6C9243}" type="datetime1">
               <a:rPr lang="en-GB" smtClean="0"/>
-              <a:t>29/05/2026</a:t>
+              <a:t>09/10/2026</a:t>
             </a:fld>
             <a:endParaRPr lang="en-GB"/>
           </a:p>
@@ -27961,7 +27948,7 @@
           <a:p>
             <a:fld id="{4B4BC937-2805-4BE1-9C10-C67D8B6C9243}" type="datetime1">
               <a:rPr lang="en-GB" smtClean="0"/>
-              <a:t>29/05/2026</a:t>
+              <a:t>09/10/2026</a:t>
             </a:fld>
             <a:endParaRPr lang="en-GB"/>
           </a:p>
@@ -28361,7 +28348,7 @@
           <a:p>
             <a:fld id="{4B4BC937-2805-4BE1-9C10-C67D8B6C9243}" type="datetime1">
               <a:rPr lang="en-GB" smtClean="0"/>
-              <a:t>29/05/2026</a:t>
+              <a:t>09/10/2026</a:t>
             </a:fld>
             <a:endParaRPr lang="en-GB"/>
           </a:p>
@@ -28613,7 +28600,7 @@
           <a:p>
             <a:fld id="{4B4BC937-2805-4BE1-9C10-C67D8B6C9243}" type="datetime1">
               <a:rPr lang="en-GB" smtClean="0"/>
-              <a:t>29/05/2026</a:t>
+              <a:t>09/10/2026</a:t>
             </a:fld>
             <a:endParaRPr lang="en-GB"/>
           </a:p>
@@ -28979,7 +28966,7 @@
           <a:p>
             <a:fld id="{4B4BC937-2805-4BE1-9C10-C67D8B6C9243}" type="datetime1">
               <a:rPr lang="en-GB" smtClean="0"/>
-              <a:t>29/05/2026</a:t>
+              <a:t>09/10/2026</a:t>
             </a:fld>
             <a:endParaRPr lang="en-GB"/>
           </a:p>
@@ -29241,7 +29228,7 @@
           <a:p>
             <a:fld id="{4B4BC937-2805-4BE1-9C10-C67D8B6C9243}" type="datetime1">
               <a:rPr lang="en-GB" smtClean="0"/>
-              <a:t>29/05/2026</a:t>
+              <a:t>09/10/2026</a:t>
             </a:fld>
             <a:endParaRPr lang="en-GB"/>
           </a:p>
@@ -29501,7 +29488,7 @@
           <a:p>
             <a:fld id="{4B4BC937-2805-4BE1-9C10-C67D8B6C9243}" type="datetime1">
               <a:rPr lang="en-GB" smtClean="0"/>
-              <a:t>29/05/2026</a:t>
+              <a:t>09/10/2026</a:t>
             </a:fld>
             <a:endParaRPr lang="en-GB"/>
           </a:p>
@@ -30121,7 +30108,7 @@
           <a:p>
             <a:fld id="{4B4BC937-2805-4BE1-9C10-C67D8B6C9243}" type="datetime1">
               <a:rPr lang="en-GB" smtClean="0"/>
-              <a:t>29/05/2026</a:t>
+              <a:t>09/10/2026</a:t>
             </a:fld>
             <a:endParaRPr lang="en-GB"/>
           </a:p>
@@ -30692,7 +30679,7 @@
           <a:p>
             <a:fld id="{4B4BC937-2805-4BE1-9C10-C67D8B6C9243}" type="datetime1">
               <a:rPr lang="en-GB" smtClean="0"/>
-              <a:t>29/05/2026</a:t>
+              <a:t>09/10/2026</a:t>
             </a:fld>
             <a:endParaRPr lang="en-GB"/>
           </a:p>
@@ -31622,7 +31609,7 @@
           <a:p>
             <a:fld id="{17C7E698-6411-43D8-BBAC-7FA3F2F21909}" type="datetime1">
               <a:rPr lang="en-GB" smtClean="0"/>
-              <a:t>29/05/2026</a:t>
+              <a:t>09/10/2026</a:t>
             </a:fld>
             <a:endParaRPr lang="en-GB"/>
           </a:p>
@@ -31792,7 +31779,7 @@
           <a:p>
             <a:fld id="{4B4BC937-2805-4BE1-9C10-C67D8B6C9243}" type="datetime1">
               <a:rPr lang="en-GB" smtClean="0"/>
-              <a:t>29/05/2026</a:t>
+              <a:t>09/10/2026</a:t>
             </a:fld>
             <a:endParaRPr lang="en-GB"/>
           </a:p>
@@ -32069,7 +32056,7 @@
           <a:p>
             <a:fld id="{4B4BC937-2805-4BE1-9C10-C67D8B6C9243}" type="datetime1">
               <a:rPr lang="en-GB" smtClean="0"/>
-              <a:t>29/05/2026</a:t>
+              <a:t>09/10/2026</a:t>
             </a:fld>
             <a:endParaRPr lang="en-GB"/>
           </a:p>
@@ -32982,7 +32969,7 @@
           <a:p>
             <a:fld id="{4B4BC937-2805-4BE1-9C10-C67D8B6C9243}" type="datetime1">
               <a:rPr lang="en-GB" smtClean="0"/>
-              <a:t>29/05/2026</a:t>
+              <a:t>09/10/2026</a:t>
             </a:fld>
             <a:endParaRPr lang="en-GB"/>
           </a:p>
@@ -34083,7 +34070,7 @@
           <a:p>
             <a:fld id="{4B4BC937-2805-4BE1-9C10-C67D8B6C9243}" type="datetime1">
               <a:rPr lang="en-GB" smtClean="0"/>
-              <a:t>29/05/2026</a:t>
+              <a:t>09/10/2026</a:t>
             </a:fld>
             <a:endParaRPr lang="en-GB"/>
           </a:p>
@@ -34998,7 +34985,7 @@
           <a:p>
             <a:fld id="{4B4BC937-2805-4BE1-9C10-C67D8B6C9243}" type="datetime1">
               <a:rPr lang="en-GB" smtClean="0"/>
-              <a:t>29/05/2026</a:t>
+              <a:t>09/10/2026</a:t>
             </a:fld>
             <a:endParaRPr lang="en-GB"/>
           </a:p>
@@ -35446,7 +35433,7 @@
           <a:p>
             <a:fld id="{4B4BC937-2805-4BE1-9C10-C67D8B6C9243}" type="datetime1">
               <a:rPr lang="en-GB" smtClean="0"/>
-              <a:t>29/05/2026</a:t>
+              <a:t>09/10/2026</a:t>
             </a:fld>
             <a:endParaRPr lang="en-GB"/>
           </a:p>
@@ -35738,7 +35725,7 @@
           <a:p>
             <a:fld id="{4B4BC937-2805-4BE1-9C10-C67D8B6C9243}" type="datetime1">
               <a:rPr lang="en-GB" smtClean="0"/>
-              <a:t>29/05/2026</a:t>
+              <a:t>09/10/2026</a:t>
             </a:fld>
             <a:endParaRPr lang="en-GB"/>
           </a:p>
@@ -36014,7 +36001,7 @@
           <a:p>
             <a:fld id="{4B4BC937-2805-4BE1-9C10-C67D8B6C9243}" type="datetime1">
               <a:rPr lang="en-GB" smtClean="0"/>
-              <a:t>29/05/2026</a:t>
+              <a:t>09/10/2026</a:t>
             </a:fld>
             <a:endParaRPr lang="en-GB"/>
           </a:p>
@@ -36338,7 +36325,7 @@
           <a:p>
             <a:fld id="{4B4BC937-2805-4BE1-9C10-C67D8B6C9243}" type="datetime1">
               <a:rPr lang="en-GB" smtClean="0"/>
-              <a:t>29/05/2026</a:t>
+              <a:t>09/10/2026</a:t>
             </a:fld>
             <a:endParaRPr lang="en-GB"/>
           </a:p>
@@ -36660,7 +36647,7 @@
           <a:p>
             <a:fld id="{4B4BC937-2805-4BE1-9C10-C67D8B6C9243}" type="datetime1">
               <a:rPr lang="en-GB" smtClean="0"/>
-              <a:t>29/05/2026</a:t>
+              <a:t>09/10/2026</a:t>
             </a:fld>
             <a:endParaRPr lang="en-GB"/>
           </a:p>
@@ -36992,7 +36979,7 @@
           <a:p>
             <a:fld id="{4B4BC937-2805-4BE1-9C10-C67D8B6C9243}" type="datetime1">
               <a:rPr lang="en-GB" smtClean="0"/>
-              <a:t>29/05/2026</a:t>
+              <a:t>09/10/2026</a:t>
             </a:fld>
             <a:endParaRPr lang="en-GB"/>
           </a:p>
@@ -37161,7 +37148,7 @@
           <a:p>
             <a:fld id="{4B4BC937-2805-4BE1-9C10-C67D8B6C9243}" type="datetime1">
               <a:rPr lang="en-GB" smtClean="0"/>
-              <a:t>29/05/2026</a:t>
+              <a:t>09/10/2026</a:t>
             </a:fld>
             <a:endParaRPr lang="en-GB"/>
           </a:p>
@@ -37589,7 +37576,7 @@
           <a:p>
             <a:fld id="{4B4BC937-2805-4BE1-9C10-C67D8B6C9243}" type="datetime1">
               <a:rPr lang="en-GB" smtClean="0"/>
-              <a:t>29/05/2026</a:t>
+              <a:t>09/10/2026</a:t>
             </a:fld>
             <a:endParaRPr lang="en-GB"/>
           </a:p>
@@ -37845,7 +37832,7 @@
           <a:p>
             <a:fld id="{4B4BC937-2805-4BE1-9C10-C67D8B6C9243}" type="datetime1">
               <a:rPr lang="en-GB" smtClean="0"/>
-              <a:t>29/05/2026</a:t>
+              <a:t>09/10/2026</a:t>
             </a:fld>
             <a:endParaRPr lang="en-GB"/>
           </a:p>
@@ -38611,7 +38598,7 @@
           <a:p>
             <a:fld id="{4B4BC937-2805-4BE1-9C10-C67D8B6C9243}" type="datetime1">
               <a:rPr lang="en-GB" smtClean="0"/>
-              <a:t>29/05/2026</a:t>
+              <a:t>09/10/2026</a:t>
             </a:fld>
             <a:endParaRPr lang="en-GB"/>
           </a:p>
@@ -39182,7 +39169,7 @@
           <a:p>
             <a:fld id="{4B4BC937-2805-4BE1-9C10-C67D8B6C9243}" type="datetime1">
               <a:rPr lang="en-GB" smtClean="0"/>
-              <a:t>29/05/2026</a:t>
+              <a:t>09/10/2026</a:t>
             </a:fld>
             <a:endParaRPr lang="en-GB"/>
           </a:p>
@@ -39430,7 +39417,7 @@
           <a:p>
             <a:fld id="{4B4BC937-2805-4BE1-9C10-C67D8B6C9243}" type="datetime1">
               <a:rPr lang="en-GB" smtClean="0"/>
-              <a:t>29/05/2026</a:t>
+              <a:t>09/10/2026</a:t>
             </a:fld>
             <a:endParaRPr lang="en-GB"/>
           </a:p>
@@ -39658,7 +39645,7 @@
           <a:p>
             <a:fld id="{4B4BC937-2805-4BE1-9C10-C67D8B6C9243}" type="datetime1">
               <a:rPr lang="en-GB" smtClean="0"/>
-              <a:t>29/05/2026</a:t>
+              <a:t>09/10/2026</a:t>
             </a:fld>
             <a:endParaRPr lang="en-GB"/>
           </a:p>
@@ -40196,7 +40183,7 @@
           <a:p>
             <a:fld id="{4B4BC937-2805-4BE1-9C10-C67D8B6C9243}" type="datetime1">
               <a:rPr lang="en-GB" smtClean="0"/>
-              <a:t>29/05/2026</a:t>
+              <a:t>09/10/2026</a:t>
             </a:fld>
             <a:endParaRPr lang="en-GB"/>
           </a:p>
@@ -40681,7 +40668,7 @@
           <a:p>
             <a:fld id="{4B4BC937-2805-4BE1-9C10-C67D8B6C9243}" type="datetime1">
               <a:rPr lang="en-GB" smtClean="0"/>
-              <a:t>29/05/2026</a:t>
+              <a:t>09/10/2026</a:t>
             </a:fld>
             <a:endParaRPr lang="en-GB"/>
           </a:p>
@@ -40927,7 +40914,7 @@
           <a:p>
             <a:fld id="{4B4BC937-2805-4BE1-9C10-C67D8B6C9243}" type="datetime1">
               <a:rPr lang="en-GB" smtClean="0"/>
-              <a:t>29/05/2026</a:t>
+              <a:t>09/10/2026</a:t>
             </a:fld>
             <a:endParaRPr lang="en-GB"/>
           </a:p>
@@ -41624,7 +41611,7 @@
           <a:p>
             <a:fld id="{4B4BC937-2805-4BE1-9C10-C67D8B6C9243}" type="datetime1">
               <a:rPr lang="en-GB" smtClean="0"/>
-              <a:t>29/05/2026</a:t>
+              <a:t>09/10/2026</a:t>
             </a:fld>
             <a:endParaRPr lang="en-GB"/>
           </a:p>
@@ -41793,7 +41780,7 @@
           <a:p>
             <a:fld id="{4B4BC937-2805-4BE1-9C10-C67D8B6C9243}" type="datetime1">
               <a:rPr lang="en-GB" smtClean="0"/>
-              <a:t>29/05/2026</a:t>
+              <a:t>09/10/2026</a:t>
             </a:fld>
             <a:endParaRPr lang="en-GB"/>
           </a:p>
@@ -42284,7 +42271,7 @@
           <a:p>
             <a:fld id="{4B4BC937-2805-4BE1-9C10-C67D8B6C9243}" type="datetime1">
               <a:rPr lang="en-GB" smtClean="0"/>
-              <a:t>29/05/2026</a:t>
+              <a:t>09/10/2026</a:t>
             </a:fld>
             <a:endParaRPr lang="en-GB"/>
           </a:p>
@@ -42747,7 +42734,7 @@
           <a:p>
             <a:fld id="{4B4BC937-2805-4BE1-9C10-C67D8B6C9243}" type="datetime1">
               <a:rPr lang="en-GB" smtClean="0"/>
-              <a:t>29/05/2026</a:t>
+              <a:t>09/10/2026</a:t>
             </a:fld>
             <a:endParaRPr lang="en-GB"/>
           </a:p>
@@ -43227,7 +43214,7 @@
           <a:p>
             <a:fld id="{4B4BC937-2805-4BE1-9C10-C67D8B6C9243}" type="datetime1">
               <a:rPr lang="en-GB" smtClean="0"/>
-              <a:t>29/05/2026</a:t>
+              <a:t>09/10/2026</a:t>
             </a:fld>
             <a:endParaRPr lang="en-GB"/>
           </a:p>
@@ -44056,7 +44043,7 @@
           <a:p>
             <a:fld id="{4B4BC937-2805-4BE1-9C10-C67D8B6C9243}" type="datetime1">
               <a:rPr lang="en-GB" smtClean="0"/>
-              <a:t>29/05/2026</a:t>
+              <a:t>09/10/2026</a:t>
             </a:fld>
             <a:endParaRPr lang="en-GB"/>
           </a:p>
@@ -44547,7 +44534,7 @@
           <a:p>
             <a:fld id="{4B4BC937-2805-4BE1-9C10-C67D8B6C9243}" type="datetime1">
               <a:rPr lang="en-GB" smtClean="0"/>
-              <a:t>29/05/2026</a:t>
+              <a:t>09/10/2026</a:t>
             </a:fld>
             <a:endParaRPr lang="en-GB"/>
           </a:p>
@@ -45253,7 +45240,7 @@
           <a:p>
             <a:fld id="{4B4BC937-2805-4BE1-9C10-C67D8B6C9243}" type="datetime1">
               <a:rPr lang="en-GB" smtClean="0"/>
-              <a:t>29/05/2026</a:t>
+              <a:t>09/10/2026</a:t>
             </a:fld>
             <a:endParaRPr lang="en-GB"/>
           </a:p>
@@ -45582,7 +45569,7 @@
           <a:p>
             <a:fld id="{4B4BC937-2805-4BE1-9C10-C67D8B6C9243}" type="datetime1">
               <a:rPr lang="en-GB" smtClean="0"/>
-              <a:t>29/05/2026</a:t>
+              <a:t>09/10/2026</a:t>
             </a:fld>
             <a:endParaRPr lang="en-GB"/>
           </a:p>
@@ -45868,7 +45855,7 @@
           <a:p>
             <a:fld id="{4B4BC937-2805-4BE1-9C10-C67D8B6C9243}" type="datetime1">
               <a:rPr lang="en-GB" smtClean="0"/>
-              <a:t>29/05/2026</a:t>
+              <a:t>09/10/2026</a:t>
             </a:fld>
             <a:endParaRPr lang="en-GB"/>
           </a:p>
@@ -46195,7 +46182,7 @@
           <a:p>
             <a:fld id="{63896447-BAB6-4DC5-9580-7E3F4D046868}" type="datetime1">
               <a:rPr lang="en-GB" smtClean="0"/>
-              <a:t>29/05/2026</a:t>
+              <a:t>09/10/2026</a:t>
             </a:fld>
             <a:endParaRPr lang="en-GB"/>
           </a:p>
@@ -46363,19 +46350,24 @@
             </a:pPr>
             <a:r>
               <a:rPr lang="en-GB" sz="2800" dirty="0"/>
-              <a:t>The link </a:t>
-            </a:r>
-            <a:r>
-              <a:rPr lang="en-GB" sz="2800"/>
-              <a:t>is </a:t>
+              <a:t>The link is </a:t>
+            </a:r>
+            <a:r>
+              <a:rPr lang="en-GB" sz="2800" dirty="0">
+                <a:hlinkClick r:id="rId3"/>
+              </a:rPr>
+              <a:t>https://ecri.short.gy/</a:t>
             </a:r>
             <a:r>
               <a:rPr lang="en-GB" sz="2800">
                 <a:hlinkClick r:id="rId3"/>
               </a:rPr>
-              <a:t>https://ecri.short.gy/feedback-rcds</a:t>
-            </a:r>
-            <a:endParaRPr lang="en-GB" sz="2800"/>
+              <a:t>feedback-fortran-intro</a:t>
+            </a:r>
+            <a:r>
+              <a:rPr lang="en-GB" sz="2800"/>
+              <a:t> </a:t>
+            </a:r>
           </a:p>
           <a:p>
             <a:pPr marL="457200" lvl="1" indent="-457200">
@@ -46408,10 +46400,10 @@
       </p:sp>
       <p:pic>
         <p:nvPicPr>
-          <p:cNvPr id="10" name="Picture 9" descr="A qr code on a white background&#10;&#10;AI-generated content may be incorrect.">
-            <a:extLst>
-              <a:ext uri="{FF2B5EF4-FFF2-40B4-BE49-F238E27FC236}">
-                <a16:creationId xmlns:a16="http://schemas.microsoft.com/office/drawing/2014/main" id="{AEABC408-700F-4CEB-9570-F86C4BB6F36F}"/>
+          <p:cNvPr id="5" name="Picture 4">
+            <a:extLst>
+              <a:ext uri="{FF2B5EF4-FFF2-40B4-BE49-F238E27FC236}">
+                <a16:creationId xmlns:a16="http://schemas.microsoft.com/office/drawing/2014/main" id="{2C2BBD9F-54B5-D899-83F0-132D22E62BED}"/>
               </a:ext>
             </a:extLst>
           </p:cNvPr>
@@ -46434,8 +46426,8 @@
         </p:blipFill>
         <p:spPr>
           <a:xfrm>
-            <a:off x="466897" y="975105"/>
-            <a:ext cx="5073535" cy="5073535"/>
+            <a:off x="522233" y="1218109"/>
+            <a:ext cx="4866480" cy="4866480"/>
           </a:xfrm>
           <a:prstGeom prst="rect">
             <a:avLst/>
@@ -46604,7 +46596,7 @@
           <a:p>
             <a:fld id="{4B4BC937-2805-4BE1-9C10-C67D8B6C9243}" type="datetime1">
               <a:rPr lang="en-GB" smtClean="0"/>
-              <a:t>29/05/2026</a:t>
+              <a:t>09/10/2026</a:t>
             </a:fld>
             <a:endParaRPr lang="en-GB"/>
           </a:p>
@@ -46959,7 +46951,7 @@
           <a:p>
             <a:fld id="{4B4BC937-2805-4BE1-9C10-C67D8B6C9243}" type="datetime1">
               <a:rPr lang="en-GB" smtClean="0"/>
-              <a:t>29/05/2026</a:t>
+              <a:t>09/10/2026</a:t>
             </a:fld>
             <a:endParaRPr lang="en-GB"/>
           </a:p>
@@ -47175,7 +47167,7 @@
           <a:p>
             <a:fld id="{4B4BC937-2805-4BE1-9C10-C67D8B6C9243}" type="datetime1">
               <a:rPr lang="en-GB" smtClean="0"/>
-              <a:t>29/05/2026</a:t>
+              <a:t>09/10/2026</a:t>
             </a:fld>
             <a:endParaRPr lang="en-GB"/>
           </a:p>
@@ -47741,7 +47733,7 @@
           <a:p>
             <a:fld id="{4B4BC937-2805-4BE1-9C10-C67D8B6C9243}" type="datetime1">
               <a:rPr lang="en-GB" smtClean="0"/>
-              <a:t>29/05/2026</a:t>
+              <a:t>09/10/2026</a:t>
             </a:fld>
             <a:endParaRPr lang="en-GB"/>
           </a:p>
@@ -48000,7 +47992,7 @@
           <a:p>
             <a:fld id="{4B4BC937-2805-4BE1-9C10-C67D8B6C9243}" type="datetime1">
               <a:rPr lang="en-GB" smtClean="0"/>
-              <a:t>29/05/2026</a:t>
+              <a:t>09/10/2026</a:t>
             </a:fld>
             <a:endParaRPr lang="en-GB"/>
           </a:p>
